--- a/fixtures/report.pptx
+++ b/fixtures/report.pptx
@@ -341,7 +341,7 @@
             <a:pPr indent="0" algn="r">
               <a:buNone/>
             </a:pPr>
-            <a:fld id="{F14B5496-DCE6-4D96-9D67-1F936C834310}" type="slidenum">
+            <a:fld id="{4918AD59-F80F-4C89-9168-28776314D2F9}" type="slidenum">
               <a:rPr b="0" lang="en-US" sz="1400" spc="-1" strike="noStrike">
                 <a:solidFill>
                   <a:srgbClr val="000000"/>
@@ -484,7 +484,7 @@
         <p:txBody>
           <a:bodyPr/>
           <a:p>
-            <a:fld id="{D4A03CE3-D8AC-48EB-927E-C997E1844895}" type="slidenum">
+            <a:fld id="{F3331070-8A34-460F-8765-1439C3A09536}" type="slidenum">
               <a:t>&lt;#&gt;</a:t>
             </a:fld>
           </a:p>
@@ -693,7 +693,7 @@
         <p:txBody>
           <a:bodyPr/>
           <a:p>
-            <a:fld id="{77F30771-B32C-46B9-AD1C-0415F61FD067}" type="slidenum">
+            <a:fld id="{8DA827B0-BC02-4FDC-A5DE-5A45B02CA86F}" type="slidenum">
               <a:t>&lt;#&gt;</a:t>
             </a:fld>
           </a:p>
@@ -988,7 +988,7 @@
         <p:txBody>
           <a:bodyPr/>
           <a:p>
-            <a:fld id="{D07E4C8D-8A30-4F18-82F2-5259799DCC40}" type="slidenum">
+            <a:fld id="{B2327086-9234-4572-8615-EF061215874E}" type="slidenum">
               <a:t>&lt;#&gt;</a:t>
             </a:fld>
           </a:p>
@@ -1369,7 +1369,7 @@
         <p:txBody>
           <a:bodyPr/>
           <a:p>
-            <a:fld id="{17FBBC11-6B16-4135-A864-13301AE1F3D4}" type="slidenum">
+            <a:fld id="{B272BDA2-B151-4B4A-93EE-C40285409DE3}" type="slidenum">
               <a:t>&lt;#&gt;</a:t>
             </a:fld>
           </a:p>
@@ -1532,7 +1532,7 @@
         <p:txBody>
           <a:bodyPr/>
           <a:p>
-            <a:fld id="{8E8197ED-5543-4FF8-AC20-F40DE0DF5CB7}" type="slidenum">
+            <a:fld id="{84872721-DEFF-4806-8554-EDBD0CD4E05B}" type="slidenum">
               <a:t>&lt;#&gt;</a:t>
             </a:fld>
           </a:p>
@@ -1698,7 +1698,7 @@
         <p:txBody>
           <a:bodyPr/>
           <a:p>
-            <a:fld id="{72085020-19BC-4D10-99D2-4D6D0958560B}" type="slidenum">
+            <a:fld id="{F7E583F3-48BF-45A5-AC13-B391CE1E7163}" type="slidenum">
               <a:t>&lt;#&gt;</a:t>
             </a:fld>
           </a:p>
@@ -1907,7 +1907,7 @@
         <p:txBody>
           <a:bodyPr/>
           <a:p>
-            <a:fld id="{93F8902E-6D7E-4487-B3C8-7046E97A8161}" type="slidenum">
+            <a:fld id="{0D03753E-3FE8-4D5F-A9F5-24846B14F954}" type="slidenum">
               <a:t>&lt;#&gt;</a:t>
             </a:fld>
           </a:p>
@@ -2030,7 +2030,7 @@
         <p:txBody>
           <a:bodyPr/>
           <a:p>
-            <a:fld id="{B57223FC-8BBD-4AE7-A523-CD356CED13F9}" type="slidenum">
+            <a:fld id="{88178391-3E57-4FCA-BC9E-BB6A2D85D1FB}" type="slidenum">
               <a:t>&lt;#&gt;</a:t>
             </a:fld>
           </a:p>
@@ -2151,7 +2151,7 @@
         <p:txBody>
           <a:bodyPr/>
           <a:p>
-            <a:fld id="{781A1F7C-D5D7-4E8D-A453-E83E0D5017A8}" type="slidenum">
+            <a:fld id="{618D34F2-F0D5-40E9-8B56-941275E62388}" type="slidenum">
               <a:t>&lt;#&gt;</a:t>
             </a:fld>
           </a:p>
@@ -2403,7 +2403,7 @@
         <p:txBody>
           <a:bodyPr/>
           <a:p>
-            <a:fld id="{59286C0D-50AB-4BFE-8963-66F801E0934B}" type="slidenum">
+            <a:fld id="{37EDE165-E6C3-4812-B8C3-39BCD3EDF9F7}" type="slidenum">
               <a:t>&lt;#&gt;</a:t>
             </a:fld>
           </a:p>
@@ -2655,7 +2655,7 @@
         <p:txBody>
           <a:bodyPr/>
           <a:p>
-            <a:fld id="{340592E6-9533-47B3-BB66-7ED37DFC5E1C}" type="slidenum">
+            <a:fld id="{0D884651-6AC7-4CC0-B268-9ACEBB60378D}" type="slidenum">
               <a:t>&lt;#&gt;</a:t>
             </a:fld>
           </a:p>
@@ -2907,7 +2907,7 @@
         <p:txBody>
           <a:bodyPr/>
           <a:p>
-            <a:fld id="{D15A203C-9C3D-41DD-9AB8-F24B19038CC1}" type="slidenum">
+            <a:fld id="{E4B10F1A-08F6-42BB-A1B5-400B8C9B1EE9}" type="slidenum">
               <a:t>&lt;#&gt;</a:t>
             </a:fld>
           </a:p>
@@ -3392,7 +3392,7 @@
             <a:pPr indent="0" algn="r">
               <a:buNone/>
             </a:pPr>
-            <a:fld id="{5C87F626-FD3A-41D2-9BE9-1C2C85390C87}" type="slidenum">
+            <a:fld id="{4CF5DCBA-BC23-406B-B20B-07940065B934}" type="slidenum">
               <a:rPr b="0" lang="en-US" sz="1400" spc="-1" strike="noStrike">
                 <a:solidFill>
                   <a:srgbClr val="000000"/>

--- a/fixtures/report.pptx
+++ b/fixtures/report.pptx
@@ -341,7 +341,7 @@
             <a:pPr indent="0" algn="r">
               <a:buNone/>
             </a:pPr>
-            <a:fld id="{4918AD59-F80F-4C89-9168-28776314D2F9}" type="slidenum">
+            <a:fld id="{E8531792-F3B3-4156-9F76-27F6FE21AF47}" type="slidenum">
               <a:rPr b="0" lang="en-US" sz="1400" spc="-1" strike="noStrike">
                 <a:solidFill>
                   <a:srgbClr val="000000"/>
@@ -484,7 +484,7 @@
         <p:txBody>
           <a:bodyPr/>
           <a:p>
-            <a:fld id="{F3331070-8A34-460F-8765-1439C3A09536}" type="slidenum">
+            <a:fld id="{1F42D474-E8CB-4BC0-8087-9A32B2B840EF}" type="slidenum">
               <a:t>&lt;#&gt;</a:t>
             </a:fld>
           </a:p>
@@ -693,7 +693,7 @@
         <p:txBody>
           <a:bodyPr/>
           <a:p>
-            <a:fld id="{8DA827B0-BC02-4FDC-A5DE-5A45B02CA86F}" type="slidenum">
+            <a:fld id="{F449DF14-4B80-4B40-BFAE-04C7CD991867}" type="slidenum">
               <a:t>&lt;#&gt;</a:t>
             </a:fld>
           </a:p>
@@ -988,7 +988,7 @@
         <p:txBody>
           <a:bodyPr/>
           <a:p>
-            <a:fld id="{B2327086-9234-4572-8615-EF061215874E}" type="slidenum">
+            <a:fld id="{D3F7DBB6-1823-4197-B3BA-77A520C32EB5}" type="slidenum">
               <a:t>&lt;#&gt;</a:t>
             </a:fld>
           </a:p>
@@ -1369,7 +1369,7 @@
         <p:txBody>
           <a:bodyPr/>
           <a:p>
-            <a:fld id="{B272BDA2-B151-4B4A-93EE-C40285409DE3}" type="slidenum">
+            <a:fld id="{390FD2C5-1644-4F51-B5C7-B092DA360A82}" type="slidenum">
               <a:t>&lt;#&gt;</a:t>
             </a:fld>
           </a:p>
@@ -1532,7 +1532,7 @@
         <p:txBody>
           <a:bodyPr/>
           <a:p>
-            <a:fld id="{84872721-DEFF-4806-8554-EDBD0CD4E05B}" type="slidenum">
+            <a:fld id="{EEC80E86-3F20-43E7-8C08-5C2AD153F2B5}" type="slidenum">
               <a:t>&lt;#&gt;</a:t>
             </a:fld>
           </a:p>
@@ -1698,7 +1698,7 @@
         <p:txBody>
           <a:bodyPr/>
           <a:p>
-            <a:fld id="{F7E583F3-48BF-45A5-AC13-B391CE1E7163}" type="slidenum">
+            <a:fld id="{61C7A5C9-CDD4-478B-9298-8E2A8DB66546}" type="slidenum">
               <a:t>&lt;#&gt;</a:t>
             </a:fld>
           </a:p>
@@ -1907,7 +1907,7 @@
         <p:txBody>
           <a:bodyPr/>
           <a:p>
-            <a:fld id="{0D03753E-3FE8-4D5F-A9F5-24846B14F954}" type="slidenum">
+            <a:fld id="{C3B86C94-989D-43BC-A3C2-DBCD88A3ABAB}" type="slidenum">
               <a:t>&lt;#&gt;</a:t>
             </a:fld>
           </a:p>
@@ -2030,7 +2030,7 @@
         <p:txBody>
           <a:bodyPr/>
           <a:p>
-            <a:fld id="{88178391-3E57-4FCA-BC9E-BB6A2D85D1FB}" type="slidenum">
+            <a:fld id="{9C94EFF4-27EC-4C5C-A24E-72144F0B8A53}" type="slidenum">
               <a:t>&lt;#&gt;</a:t>
             </a:fld>
           </a:p>
@@ -2151,7 +2151,7 @@
         <p:txBody>
           <a:bodyPr/>
           <a:p>
-            <a:fld id="{618D34F2-F0D5-40E9-8B56-941275E62388}" type="slidenum">
+            <a:fld id="{FA28AB7D-62C6-42EC-92FA-830A68904701}" type="slidenum">
               <a:t>&lt;#&gt;</a:t>
             </a:fld>
           </a:p>
@@ -2403,7 +2403,7 @@
         <p:txBody>
           <a:bodyPr/>
           <a:p>
-            <a:fld id="{37EDE165-E6C3-4812-B8C3-39BCD3EDF9F7}" type="slidenum">
+            <a:fld id="{E6364956-48E2-48E4-BDF4-0EA01E9626D5}" type="slidenum">
               <a:t>&lt;#&gt;</a:t>
             </a:fld>
           </a:p>
@@ -2655,7 +2655,7 @@
         <p:txBody>
           <a:bodyPr/>
           <a:p>
-            <a:fld id="{0D884651-6AC7-4CC0-B268-9ACEBB60378D}" type="slidenum">
+            <a:fld id="{12F90C8C-D5E2-43D0-B084-0EEB7FC80106}" type="slidenum">
               <a:t>&lt;#&gt;</a:t>
             </a:fld>
           </a:p>
@@ -2907,7 +2907,7 @@
         <p:txBody>
           <a:bodyPr/>
           <a:p>
-            <a:fld id="{E4B10F1A-08F6-42BB-A1B5-400B8C9B1EE9}" type="slidenum">
+            <a:fld id="{1D7CAA5E-D825-4CB3-B26B-E88B59E6E920}" type="slidenum">
               <a:t>&lt;#&gt;</a:t>
             </a:fld>
           </a:p>
@@ -3392,7 +3392,7 @@
             <a:pPr indent="0" algn="r">
               <a:buNone/>
             </a:pPr>
-            <a:fld id="{4CF5DCBA-BC23-406B-B20B-07940065B934}" type="slidenum">
+            <a:fld id="{CF873B3A-3088-4A9E-B2E7-DCF1F1136B5F}" type="slidenum">
               <a:rPr b="0" lang="en-US" sz="1400" spc="-1" strike="noStrike">
                 <a:solidFill>
                   <a:srgbClr val="000000"/>

--- a/fixtures/report.pptx
+++ b/fixtures/report.pptx
@@ -341,7 +341,7 @@
             <a:pPr indent="0" algn="r">
               <a:buNone/>
             </a:pPr>
-            <a:fld id="{E8531792-F3B3-4156-9F76-27F6FE21AF47}" type="slidenum">
+            <a:fld id="{70AEA7CB-3C39-4D6E-A8FB-799C4096EE8E}" type="slidenum">
               <a:rPr b="0" lang="en-US" sz="1400" spc="-1" strike="noStrike">
                 <a:solidFill>
                   <a:srgbClr val="000000"/>
@@ -484,7 +484,7 @@
         <p:txBody>
           <a:bodyPr/>
           <a:p>
-            <a:fld id="{1F42D474-E8CB-4BC0-8087-9A32B2B840EF}" type="slidenum">
+            <a:fld id="{9EFE0696-2E13-4761-A3E7-3624D3DFEB67}" type="slidenum">
               <a:t>&lt;#&gt;</a:t>
             </a:fld>
           </a:p>
@@ -693,7 +693,7 @@
         <p:txBody>
           <a:bodyPr/>
           <a:p>
-            <a:fld id="{F449DF14-4B80-4B40-BFAE-04C7CD991867}" type="slidenum">
+            <a:fld id="{BE959EC9-8009-4D09-BD16-D3C0CE10FEDE}" type="slidenum">
               <a:t>&lt;#&gt;</a:t>
             </a:fld>
           </a:p>
@@ -988,7 +988,7 @@
         <p:txBody>
           <a:bodyPr/>
           <a:p>
-            <a:fld id="{D3F7DBB6-1823-4197-B3BA-77A520C32EB5}" type="slidenum">
+            <a:fld id="{4D3C7706-67C4-4B1E-9E39-F7F8A2839AAA}" type="slidenum">
               <a:t>&lt;#&gt;</a:t>
             </a:fld>
           </a:p>
@@ -1369,7 +1369,7 @@
         <p:txBody>
           <a:bodyPr/>
           <a:p>
-            <a:fld id="{390FD2C5-1644-4F51-B5C7-B092DA360A82}" type="slidenum">
+            <a:fld id="{54C7C2B7-EC3D-45EC-8894-40550E166A39}" type="slidenum">
               <a:t>&lt;#&gt;</a:t>
             </a:fld>
           </a:p>
@@ -1532,7 +1532,7 @@
         <p:txBody>
           <a:bodyPr/>
           <a:p>
-            <a:fld id="{EEC80E86-3F20-43E7-8C08-5C2AD153F2B5}" type="slidenum">
+            <a:fld id="{AF56E552-6DC9-4A74-BB91-0F10332EB0AF}" type="slidenum">
               <a:t>&lt;#&gt;</a:t>
             </a:fld>
           </a:p>
@@ -1698,7 +1698,7 @@
         <p:txBody>
           <a:bodyPr/>
           <a:p>
-            <a:fld id="{61C7A5C9-CDD4-478B-9298-8E2A8DB66546}" type="slidenum">
+            <a:fld id="{7459D801-7461-46D9-8B35-8AE6D4E7F94F}" type="slidenum">
               <a:t>&lt;#&gt;</a:t>
             </a:fld>
           </a:p>
@@ -1907,7 +1907,7 @@
         <p:txBody>
           <a:bodyPr/>
           <a:p>
-            <a:fld id="{C3B86C94-989D-43BC-A3C2-DBCD88A3ABAB}" type="slidenum">
+            <a:fld id="{17F516EC-EA81-45E6-8ED3-E5E49D12B4C5}" type="slidenum">
               <a:t>&lt;#&gt;</a:t>
             </a:fld>
           </a:p>
@@ -2030,7 +2030,7 @@
         <p:txBody>
           <a:bodyPr/>
           <a:p>
-            <a:fld id="{9C94EFF4-27EC-4C5C-A24E-72144F0B8A53}" type="slidenum">
+            <a:fld id="{CE3052C3-E5FA-4486-9576-8B09006268A0}" type="slidenum">
               <a:t>&lt;#&gt;</a:t>
             </a:fld>
           </a:p>
@@ -2151,7 +2151,7 @@
         <p:txBody>
           <a:bodyPr/>
           <a:p>
-            <a:fld id="{FA28AB7D-62C6-42EC-92FA-830A68904701}" type="slidenum">
+            <a:fld id="{671D4D28-6234-461E-ADFF-22CE21E3244B}" type="slidenum">
               <a:t>&lt;#&gt;</a:t>
             </a:fld>
           </a:p>
@@ -2403,7 +2403,7 @@
         <p:txBody>
           <a:bodyPr/>
           <a:p>
-            <a:fld id="{E6364956-48E2-48E4-BDF4-0EA01E9626D5}" type="slidenum">
+            <a:fld id="{74FA5008-FDB8-4AA4-B3EF-F66799F8A382}" type="slidenum">
               <a:t>&lt;#&gt;</a:t>
             </a:fld>
           </a:p>
@@ -2655,7 +2655,7 @@
         <p:txBody>
           <a:bodyPr/>
           <a:p>
-            <a:fld id="{12F90C8C-D5E2-43D0-B084-0EEB7FC80106}" type="slidenum">
+            <a:fld id="{62B69E87-EFDA-46EE-8FD2-828328BE63DE}" type="slidenum">
               <a:t>&lt;#&gt;</a:t>
             </a:fld>
           </a:p>
@@ -2907,7 +2907,7 @@
         <p:txBody>
           <a:bodyPr/>
           <a:p>
-            <a:fld id="{1D7CAA5E-D825-4CB3-B26B-E88B59E6E920}" type="slidenum">
+            <a:fld id="{49E13F0C-DBD9-4C32-A91E-7190BE40104A}" type="slidenum">
               <a:t>&lt;#&gt;</a:t>
             </a:fld>
           </a:p>
@@ -3392,7 +3392,7 @@
             <a:pPr indent="0" algn="r">
               <a:buNone/>
             </a:pPr>
-            <a:fld id="{CF873B3A-3088-4A9E-B2E7-DCF1F1136B5F}" type="slidenum">
+            <a:fld id="{C568F37D-765F-4394-8097-096585EA9E27}" type="slidenum">
               <a:rPr b="0" lang="en-US" sz="1400" spc="-1" strike="noStrike">
                 <a:solidFill>
                   <a:srgbClr val="000000"/>
